--- a/docs/byakugan.pptx
+++ b/docs/byakugan.pptx
@@ -8122,17 +8122,6 @@
           </a:bodyPr>
           <a:lstStyle/>
           <a:p>
-            <a:pPr algn="l">
-              <a:lnSpc>
-                <a:spcPct val="115000"/>
-              </a:lnSpc>
-              <a:spcBef>
-                <a:spcPts val="0"/>
-              </a:spcBef>
-              <a:spcAft>
-                <a:spcPts val="0"/>
-              </a:spcAft>
-            </a:pPr>
             <a:r>
               <a:rPr sz="1100" b="0" dirty="0">
                 <a:solidFill>
@@ -8140,16 +8129,16 @@
                 </a:solidFill>
                 <a:latin typeface="Cascadia Code"/>
               </a:rPr>
-              <a:t>IBM Bob 2.0 Hackathon   ·   48 hours   </a:t>
-            </a:r>
-            <a:r>
-              <a:rPr sz="1100" b="0">
+              <a:t>IBM Bob 2.0 Hackathon   ·   48 hours   ·   </a:t>
+            </a:r>
+            <a:r>
+              <a:rPr lang="en-US" sz="1100" dirty="0">
                 <a:solidFill>
                   <a:srgbClr val="5A6076"/>
                 </a:solidFill>
                 <a:latin typeface="Cascadia Code"/>
               </a:rPr>
-              <a:t>·   </a:t>
+              <a:t>https://byakugan-frontend.onrender.com/</a:t>
             </a:r>
             <a:endParaRPr sz="1100" b="0" dirty="0">
               <a:solidFill>
